--- a/PitCrew_Connect_Showcase.pptx
+++ b/PitCrew_Connect_Showcase.pptx
@@ -13,6 +13,9 @@
     <p:sldId id="261" r:id="rId12"/>
     <p:sldId id="262" r:id="rId13"/>
     <p:sldId id="263" r:id="rId14"/>
+    <p:sldId id="264" r:id="rId15"/>
+    <p:sldId id="265" r:id="rId16"/>
+    <p:sldId id="266" r:id="rId17"/>
   </p:sldIdLst>
   <p:sldSz cx="12191695" cy="6858000" type="screen4x3"/>
   <p:notesSz cx="6858000" cy="9144000"/>
@@ -3091,7 +3094,7 @@
     <p:bg>
       <p:bgPr>
         <a:solidFill>
-          <a:srgbClr val="0A0B14"/>
+          <a:srgbClr val="06060C"/>
         </a:solidFill>
         <a:effectLst/>
       </p:bgPr>
@@ -3207,42 +3210,6 @@
           </a:p>
         </p:txBody>
       </p:sp>
-      <p:sp>
-        <p:nvSpPr>
-          <p:cNvPr id="4" name="TextBox 3"/>
-          <p:cNvSpPr txBox="1"/>
-          <p:nvPr/>
-        </p:nvSpPr>
-        <p:spPr>
-          <a:xfrm>
-            <a:off x="731520" y="4389120"/>
-            <a:ext cx="10058400" cy="1371600"/>
-          </a:xfrm>
-          <a:prstGeom prst="rect">
-            <a:avLst/>
-          </a:prstGeom>
-          <a:noFill/>
-        </p:spPr>
-        <p:txBody>
-          <a:bodyPr wrap="square">
-            <a:spAutoFit/>
-          </a:bodyPr>
-          <a:lstStyle/>
-          <a:p>
-            <a:pPr>
-              <a:defRPr sz="1600">
-                <a:solidFill>
-                  <a:srgbClr val="8E9FB6"/>
-                </a:solidFill>
-                <a:latin typeface="Segoe UI"/>
-              </a:defRPr>
-            </a:pPr>
-            <a:r>
-              <a:t>An integrated role-based system connecting stranded drivers, verified mechanics, and operational admins in a real-time dispatch and tracking network.</a:t>
-            </a:r>
-          </a:p>
-        </p:txBody>
-      </p:sp>
     </p:spTree>
   </p:cSld>
   <p:clrMapOvr>
@@ -3251,13 +3218,13 @@
 </p:sld>
 </file>
 
-<file path=ppt/slides/slide2.xml><?xml version="1.0" encoding="utf-8"?>
+<file path=ppt/slides/slide10.xml><?xml version="1.0" encoding="utf-8"?>
 <p:sld xmlns:a="http://schemas.openxmlformats.org/drawingml/2006/main" xmlns:p="http://schemas.openxmlformats.org/presentationml/2006/main" xmlns:r="http://schemas.openxmlformats.org/officeDocument/2006/relationships">
   <p:cSld>
     <p:bg>
       <p:bgPr>
         <a:solidFill>
-          <a:srgbClr val="0A0B14"/>
+          <a:srgbClr val="06060C"/>
         </a:solidFill>
         <a:effectLst/>
       </p:bgPr>
@@ -3300,835 +3267,22 @@
               </a:defRPr>
             </a:pPr>
             <a:r>
-              <a:t>The Roadside Assistance Bottleneck</a:t>
-            </a:r>
-          </a:p>
-        </p:txBody>
-      </p:sp>
-      <p:sp>
-        <p:nvSpPr>
-          <p:cNvPr id="3" name="TextBox 2"/>
-          <p:cNvSpPr txBox="1"/>
-          <p:nvPr/>
-        </p:nvSpPr>
-        <p:spPr>
-          <a:xfrm>
-            <a:off x="731520" y="1463040"/>
-            <a:ext cx="4937760" cy="4114800"/>
-          </a:xfrm>
-          <a:prstGeom prst="rect">
-            <a:avLst/>
-          </a:prstGeom>
-          <a:noFill/>
-        </p:spPr>
-        <p:txBody>
-          <a:bodyPr wrap="square">
-            <a:spAutoFit/>
-          </a:bodyPr>
-          <a:lstStyle/>
-          <a:p>
-            <a:pPr>
-              <a:defRPr sz="1800" b="1">
-                <a:solidFill>
-                  <a:srgbClr val="4285F4"/>
-                </a:solidFill>
-                <a:latin typeface="Segoe UI"/>
-              </a:defRPr>
-            </a:pPr>
-            <a:r>
-              <a:t>THE LAYMAN CALL CENTER ANALOGY</a:t>
-            </a:r>
-          </a:p>
-          <a:p>
-            <a:pPr>
-              <a:spcAft>
-                <a:spcPts val="1200"/>
-              </a:spcAft>
-              <a:defRPr sz="1600">
-                <a:solidFill>
-                  <a:srgbClr val="F5F7FA"/>
-                </a:solidFill>
-                <a:latin typeface="Segoe UI"/>
-              </a:defRPr>
-            </a:pPr>
-            <a:r>
-              <a:t>Traditional roadside assistance is like mailing letters to call a taxi.</a:t>
-            </a:r>
-          </a:p>
-          <a:p>
-            <a:pPr>
-              <a:spcAft>
-                <a:spcPts val="1200"/>
-              </a:spcAft>
-              <a:defRPr sz="1600">
-                <a:solidFill>
-                  <a:srgbClr val="F5F7FA"/>
-                </a:solidFill>
-                <a:latin typeface="Segoe UI"/>
-              </a:defRPr>
-            </a:pPr>
-            <a:r>
-              <a:t>Stranded drivers wait on phone brokers, explain locations blindly, and guess ETAs.</a:t>
-            </a:r>
-          </a:p>
-          <a:p>
-            <a:pPr>
-              <a:spcAft>
-                <a:spcPts val="1200"/>
-              </a:spcAft>
-              <a:defRPr sz="1600">
-                <a:solidFill>
-                  <a:srgbClr val="F5F7FA"/>
-                </a:solidFill>
-                <a:latin typeface="Segoe UI"/>
-              </a:defRPr>
-            </a:pPr>
-            <a:r>
-              <a:t>Towing systems suffer from unvetted service quality and manual coordinate dispatch.</a:t>
-            </a:r>
-          </a:p>
-        </p:txBody>
-      </p:sp>
-      <p:sp>
-        <p:nvSpPr>
-          <p:cNvPr id="4" name="TextBox 3"/>
-          <p:cNvSpPr txBox="1"/>
-          <p:nvPr/>
-        </p:nvSpPr>
-        <p:spPr>
-          <a:xfrm>
-            <a:off x="6217920" y="1463040"/>
-            <a:ext cx="4937760" cy="4114800"/>
-          </a:xfrm>
-          <a:prstGeom prst="rect">
-            <a:avLst/>
-          </a:prstGeom>
-          <a:noFill/>
-        </p:spPr>
-        <p:txBody>
-          <a:bodyPr wrap="square">
-            <a:spAutoFit/>
-          </a:bodyPr>
-          <a:lstStyle/>
-          <a:p>
-            <a:pPr>
-              <a:defRPr sz="1800" b="1">
-                <a:solidFill>
-                  <a:srgbClr val="D96BBA"/>
-                </a:solidFill>
-                <a:latin typeface="Segoe UI"/>
-              </a:defRPr>
-            </a:pPr>
-            <a:r>
-              <a:t>THE PITCREW CONNECT SOLUTION</a:t>
-            </a:r>
-          </a:p>
-          <a:p>
-            <a:pPr>
-              <a:spcAft>
-                <a:spcPts val="1200"/>
-              </a:spcAft>
-              <a:defRPr sz="1600">
-                <a:solidFill>
-                  <a:srgbClr val="F5F7FA"/>
-                </a:solidFill>
-                <a:latin typeface="Segoe UI"/>
-              </a:defRPr>
-            </a:pPr>
-            <a:r>
-              <a:t>Digital intake routes breakdown locations directly to regional mechanics.</a:t>
-            </a:r>
-          </a:p>
-          <a:p>
-            <a:pPr>
-              <a:spcAft>
-                <a:spcPts val="1200"/>
-              </a:spcAft>
-              <a:defRPr sz="1600">
-                <a:solidFill>
-                  <a:srgbClr val="F5F7FA"/>
-                </a:solidFill>
-                <a:latin typeface="Segoe UI"/>
-              </a:defRPr>
-            </a:pPr>
-            <a:r>
-              <a:t>Interactive route vectors update coordinates in real time on mechanic screens.</a:t>
-            </a:r>
-          </a:p>
-          <a:p>
-            <a:pPr>
-              <a:spcAft>
-                <a:spcPts val="1200"/>
-              </a:spcAft>
-              <a:defRPr sz="1600">
-                <a:solidFill>
-                  <a:srgbClr val="F5F7FA"/>
-                </a:solidFill>
-                <a:latin typeface="Segoe UI"/>
-              </a:defRPr>
-            </a:pPr>
-            <a:r>
-              <a:t>Strict operational supervision keeps dispatcher databases secure and vetted.</a:t>
-            </a:r>
-          </a:p>
-        </p:txBody>
-      </p:sp>
-    </p:spTree>
-  </p:cSld>
-  <p:clrMapOvr>
-    <a:masterClrMapping/>
-  </p:clrMapOvr>
-</p:sld>
-</file>
-
-<file path=ppt/slides/slide3.xml><?xml version="1.0" encoding="utf-8"?>
-<p:sld xmlns:a="http://schemas.openxmlformats.org/drawingml/2006/main" xmlns:p="http://schemas.openxmlformats.org/presentationml/2006/main" xmlns:r="http://schemas.openxmlformats.org/officeDocument/2006/relationships">
-  <p:cSld>
-    <p:bg>
-      <p:bgPr>
-        <a:solidFill>
-          <a:srgbClr val="0A0B14"/>
-        </a:solidFill>
-        <a:effectLst/>
-      </p:bgPr>
-    </p:bg>
-    <p:spTree>
-      <p:nvGrpSpPr>
-        <p:cNvPr id="1" name=""/>
-        <p:cNvGrpSpPr/>
-        <p:nvPr/>
-      </p:nvGrpSpPr>
-      <p:grpSpPr/>
-      <p:sp>
-        <p:nvSpPr>
-          <p:cNvPr id="2" name="TextBox 1"/>
-          <p:cNvSpPr txBox="1"/>
-          <p:nvPr/>
-        </p:nvSpPr>
-        <p:spPr>
-          <a:xfrm>
-            <a:off x="731520" y="457200"/>
-            <a:ext cx="10515600" cy="731520"/>
-          </a:xfrm>
-          <a:prstGeom prst="rect">
-            <a:avLst/>
-          </a:prstGeom>
-          <a:noFill/>
-        </p:spPr>
-        <p:txBody>
-          <a:bodyPr wrap="square">
-            <a:spAutoFit/>
-          </a:bodyPr>
-          <a:lstStyle/>
-          <a:p>
-            <a:pPr>
-              <a:defRPr sz="3600" b="1">
-                <a:solidFill>
-                  <a:srgbClr val="F5F7FA"/>
-                </a:solidFill>
-                <a:latin typeface="Segoe UI"/>
-              </a:defRPr>
-            </a:pPr>
-            <a:r>
-              <a:t>Roadside Dispatch Platform Evolution</a:t>
-            </a:r>
-          </a:p>
-        </p:txBody>
-      </p:sp>
-      <p:sp>
-        <p:nvSpPr>
-          <p:cNvPr id="3" name="TextBox 2"/>
-          <p:cNvSpPr txBox="1"/>
-          <p:nvPr/>
-        </p:nvSpPr>
-        <p:spPr>
-          <a:xfrm>
-            <a:off x="731520" y="1463040"/>
-            <a:ext cx="10515600" cy="4389120"/>
-          </a:xfrm>
-          <a:prstGeom prst="rect">
-            <a:avLst/>
-          </a:prstGeom>
-          <a:noFill/>
-        </p:spPr>
-        <p:txBody>
-          <a:bodyPr wrap="square">
-            <a:spAutoFit/>
-          </a:bodyPr>
-          <a:lstStyle/>
-          <a:p>
-            <a:pPr>
-              <a:spcAft>
-                <a:spcPts val="1400"/>
-              </a:spcAft>
-              <a:defRPr sz="1800">
-                <a:solidFill>
-                  <a:srgbClr val="F5F7FA"/>
-                </a:solidFill>
-                <a:latin typeface="Segoe UI"/>
-              </a:defRPr>
-            </a:pPr>
-            <a:r>
-              <a:t>Before 2010: Physical directories and paper catalogs (offline towing call lines).</a:t>
-            </a:r>
-          </a:p>
-          <a:p>
-            <a:pPr>
-              <a:spcAft>
-                <a:spcPts val="1400"/>
-              </a:spcAft>
-              <a:defRPr sz="1800">
-                <a:solidFill>
-                  <a:srgbClr val="F5F7FA"/>
-                </a:solidFill>
-                <a:latin typeface="Segoe UI"/>
-              </a:defRPr>
-            </a:pPr>
-            <a:r>
-              <a:t>2015: Static business web listings. Drivers call individual shops for quotes.</a:t>
-            </a:r>
-          </a:p>
-          <a:p>
-            <a:pPr>
-              <a:spcAft>
-                <a:spcPts val="1400"/>
-              </a:spcAft>
-              <a:defRPr sz="1800">
-                <a:solidFill>
-                  <a:srgbClr val="F5F7FA"/>
-                </a:solidFill>
-                <a:latin typeface="Segoe UI"/>
-              </a:defRPr>
-            </a:pPr>
-            <a:r>
-              <a:t>2020: Consolidated garage portals. Bookings route manually, causing dispatch lag.</a:t>
-            </a:r>
-          </a:p>
-          <a:p>
-            <a:pPr>
-              <a:spcAft>
-                <a:spcPts val="1400"/>
-              </a:spcAft>
-              <a:defRPr sz="1800">
-                <a:solidFill>
-                  <a:srgbClr val="F5F7FA"/>
-                </a:solidFill>
-                <a:latin typeface="Segoe UI"/>
-              </a:defRPr>
-            </a:pPr>
-            <a:r>
-              <a:t>2026+: Automated on-demand marketplaces. Vetted mechanic onboarding and live map routes.</a:t>
-            </a:r>
-          </a:p>
-        </p:txBody>
-      </p:sp>
-    </p:spTree>
-  </p:cSld>
-  <p:clrMapOvr>
-    <a:masterClrMapping/>
-  </p:clrMapOvr>
-</p:sld>
-</file>
-
-<file path=ppt/slides/slide4.xml><?xml version="1.0" encoding="utf-8"?>
-<p:sld xmlns:a="http://schemas.openxmlformats.org/drawingml/2006/main" xmlns:p="http://schemas.openxmlformats.org/presentationml/2006/main" xmlns:r="http://schemas.openxmlformats.org/officeDocument/2006/relationships">
-  <p:cSld>
-    <p:bg>
-      <p:bgPr>
-        <a:solidFill>
-          <a:srgbClr val="0A0B14"/>
-        </a:solidFill>
-        <a:effectLst/>
-      </p:bgPr>
-    </p:bg>
-    <p:spTree>
-      <p:nvGrpSpPr>
-        <p:cNvPr id="1" name=""/>
-        <p:cNvGrpSpPr/>
-        <p:nvPr/>
-      </p:nvGrpSpPr>
-      <p:grpSpPr/>
-      <p:sp>
-        <p:nvSpPr>
-          <p:cNvPr id="2" name="TextBox 1"/>
-          <p:cNvSpPr txBox="1"/>
-          <p:nvPr/>
-        </p:nvSpPr>
-        <p:spPr>
-          <a:xfrm>
-            <a:off x="731520" y="457200"/>
-            <a:ext cx="10515600" cy="731520"/>
-          </a:xfrm>
-          <a:prstGeom prst="rect">
-            <a:avLst/>
-          </a:prstGeom>
-          <a:noFill/>
-        </p:spPr>
-        <p:txBody>
-          <a:bodyPr wrap="square">
-            <a:spAutoFit/>
-          </a:bodyPr>
-          <a:lstStyle/>
-          <a:p>
-            <a:pPr>
-              <a:defRPr sz="3600" b="1">
-                <a:solidFill>
-                  <a:srgbClr val="F5F7FA"/>
-                </a:solidFill>
-                <a:latin typeface="Segoe UI"/>
-              </a:defRPr>
-            </a:pPr>
-            <a:r>
-              <a:t>Platform System Architecture</a:t>
-            </a:r>
-          </a:p>
-        </p:txBody>
-      </p:sp>
-      <p:sp>
-        <p:nvSpPr>
-          <p:cNvPr id="3" name="TextBox 2"/>
-          <p:cNvSpPr txBox="1"/>
-          <p:nvPr/>
-        </p:nvSpPr>
-        <p:spPr>
-          <a:xfrm>
-            <a:off x="731520" y="1463040"/>
-            <a:ext cx="10515600" cy="4389120"/>
-          </a:xfrm>
-          <a:prstGeom prst="rect">
-            <a:avLst/>
-          </a:prstGeom>
-          <a:noFill/>
-        </p:spPr>
-        <p:txBody>
-          <a:bodyPr wrap="square">
-            <a:spAutoFit/>
-          </a:bodyPr>
-          <a:lstStyle/>
-          <a:p>
-            <a:pPr>
-              <a:spcAft>
-                <a:spcPts val="1400"/>
-              </a:spcAft>
-              <a:defRPr sz="1800">
-                <a:solidFill>
-                  <a:srgbClr val="F5F7FA"/>
-                </a:solidFill>
-                <a:latin typeface="Segoe UI"/>
-              </a:defRPr>
-            </a:pPr>
-            <a:r>
-              <a:t>Drivers Frontend: Geolocation client interface. Captures breakdown coords and issue details.</a:t>
-            </a:r>
-          </a:p>
-          <a:p>
-            <a:pPr>
-              <a:spcAft>
-                <a:spcPts val="1400"/>
-              </a:spcAft>
-              <a:defRPr sz="1800">
-                <a:solidFill>
-                  <a:srgbClr val="F5F7FA"/>
-                </a:solidFill>
-                <a:latin typeface="Segoe UI"/>
-              </a:defRPr>
-            </a:pPr>
-            <a:r>
-              <a:t>Node.js Backend Server: Central dispatcher. Coordinates requests, matches, and database queries.</a:t>
-            </a:r>
-          </a:p>
-          <a:p>
-            <a:pPr>
-              <a:spcAft>
-                <a:spcPts val="1400"/>
-              </a:spcAft>
-              <a:defRPr sz="1800">
-                <a:solidFill>
-                  <a:srgbClr val="F5F7FA"/>
-                </a:solidFill>
-                <a:latin typeface="Segoe UI"/>
-              </a:defRPr>
-            </a:pPr>
-            <a:r>
-              <a:t>Mechanics Client: target interface. Receives job cards, routes, and confirms dispatches.</a:t>
-            </a:r>
-          </a:p>
-          <a:p>
-            <a:pPr>
-              <a:spcAft>
-                <a:spcPts val="1400"/>
-              </a:spcAft>
-              <a:defRPr sz="1800">
-                <a:solidFill>
-                  <a:srgbClr val="F5F7FA"/>
-                </a:solidFill>
-                <a:latin typeface="Segoe UI"/>
-              </a:defRPr>
-            </a:pPr>
-            <a:r>
-              <a:t>PostgreSQL Store: Hashed account credentials, active dispatcher logs, and persistent session states.</a:t>
-            </a:r>
-          </a:p>
-        </p:txBody>
-      </p:sp>
-    </p:spTree>
-  </p:cSld>
-  <p:clrMapOvr>
-    <a:masterClrMapping/>
-  </p:clrMapOvr>
-</p:sld>
-</file>
-
-<file path=ppt/slides/slide5.xml><?xml version="1.0" encoding="utf-8"?>
-<p:sld xmlns:a="http://schemas.openxmlformats.org/drawingml/2006/main" xmlns:p="http://schemas.openxmlformats.org/presentationml/2006/main" xmlns:r="http://schemas.openxmlformats.org/officeDocument/2006/relationships">
-  <p:cSld>
-    <p:bg>
-      <p:bgPr>
-        <a:solidFill>
-          <a:srgbClr val="0A0B14"/>
-        </a:solidFill>
-        <a:effectLst/>
-      </p:bgPr>
-    </p:bg>
-    <p:spTree>
-      <p:nvGrpSpPr>
-        <p:cNvPr id="1" name=""/>
-        <p:cNvGrpSpPr/>
-        <p:nvPr/>
-      </p:nvGrpSpPr>
-      <p:grpSpPr/>
-      <p:sp>
-        <p:nvSpPr>
-          <p:cNvPr id="2" name="TextBox 1"/>
-          <p:cNvSpPr txBox="1"/>
-          <p:nvPr/>
-        </p:nvSpPr>
-        <p:spPr>
-          <a:xfrm>
-            <a:off x="731520" y="457200"/>
-            <a:ext cx="10515600" cy="731520"/>
-          </a:xfrm>
-          <a:prstGeom prst="rect">
-            <a:avLst/>
-          </a:prstGeom>
-          <a:noFill/>
-        </p:spPr>
-        <p:txBody>
-          <a:bodyPr wrap="square">
-            <a:spAutoFit/>
-          </a:bodyPr>
-          <a:lstStyle/>
-          <a:p>
-            <a:pPr>
-              <a:defRPr sz="3600" b="1">
-                <a:solidFill>
-                  <a:srgbClr val="F5F7FA"/>
-                </a:solidFill>
-                <a:latin typeface="Segoe UI"/>
-              </a:defRPr>
-            </a:pPr>
-            <a:r>
-              <a:t>Operations &amp; Dispatch Flow</a:t>
-            </a:r>
-          </a:p>
-        </p:txBody>
-      </p:sp>
-      <p:sp>
-        <p:nvSpPr>
-          <p:cNvPr id="3" name="TextBox 2"/>
-          <p:cNvSpPr txBox="1"/>
-          <p:nvPr/>
-        </p:nvSpPr>
-        <p:spPr>
-          <a:xfrm>
-            <a:off x="731520" y="1188720"/>
-            <a:ext cx="10515600" cy="731520"/>
-          </a:xfrm>
-          <a:prstGeom prst="rect">
-            <a:avLst/>
-          </a:prstGeom>
-          <a:noFill/>
-        </p:spPr>
-        <p:txBody>
-          <a:bodyPr wrap="square">
-            <a:spAutoFit/>
-          </a:bodyPr>
-          <a:lstStyle/>
-          <a:p>
-            <a:pPr>
-              <a:defRPr sz="1600" i="1">
-                <a:solidFill>
-                  <a:srgbClr val="8E9FB6"/>
-                </a:solidFill>
-                <a:latin typeface="Segoe UI"/>
-              </a:defRPr>
-            </a:pPr>
-            <a:r>
-              <a:t>A real-time dispatch cycle coordinate sequence comprising 4 stages:</a:t>
-            </a:r>
-          </a:p>
-        </p:txBody>
-      </p:sp>
-      <p:sp>
-        <p:nvSpPr>
-          <p:cNvPr id="4" name="TextBox 3"/>
-          <p:cNvSpPr txBox="1"/>
-          <p:nvPr/>
-        </p:nvSpPr>
-        <p:spPr>
-          <a:xfrm>
-            <a:off x="731520" y="2011680"/>
-            <a:ext cx="10515600" cy="3840480"/>
-          </a:xfrm>
-          <a:prstGeom prst="rect">
-            <a:avLst/>
-          </a:prstGeom>
-          <a:noFill/>
-        </p:spPr>
-        <p:txBody>
-          <a:bodyPr wrap="square">
-            <a:spAutoFit/>
-          </a:bodyPr>
-          <a:lstStyle/>
-          <a:p>
-            <a:pPr>
-              <a:spcAft>
-                <a:spcPts val="1400"/>
-              </a:spcAft>
-              <a:defRPr sz="1800">
-                <a:solidFill>
-                  <a:srgbClr val="F5F7FA"/>
-                </a:solidFill>
-                <a:latin typeface="Segoe UI"/>
-              </a:defRPr>
-            </a:pPr>
-            <a:r>
-              <a:t>01. Drivers Intake (FETCH): Breakdown coordinates and issue summaries routed to dispatch hub.</a:t>
-            </a:r>
-          </a:p>
-          <a:p>
-            <a:pPr>
-              <a:spcAft>
-                <a:spcPts val="1400"/>
-              </a:spcAft>
-              <a:defRPr sz="1800">
-                <a:solidFill>
-                  <a:srgbClr val="F5F7FA"/>
-                </a:solidFill>
-                <a:latin typeface="Segoe UI"/>
-              </a:defRPr>
-            </a:pPr>
-            <a:r>
-              <a:t>02. Database Match (READ): Server queries availability and matches closest regional mechanic.</a:t>
-            </a:r>
-          </a:p>
-          <a:p>
-            <a:pPr>
-              <a:spcAft>
-                <a:spcPts val="1400"/>
-              </a:spcAft>
-              <a:defRPr sz="1800">
-                <a:solidFill>
-                  <a:srgbClr val="F5F7FA"/>
-                </a:solidFill>
-                <a:latin typeface="Segoe UI"/>
-              </a:defRPr>
-            </a:pPr>
-            <a:r>
-              <a:t>03. Dispatch Confirmation (WRITE): Mechanic confirms match, locking coordinates and starting route.</a:t>
-            </a:r>
-          </a:p>
-          <a:p>
-            <a:pPr>
-              <a:spcAft>
-                <a:spcPts val="1400"/>
-              </a:spcAft>
-              <a:defRPr sz="1800">
-                <a:solidFill>
-                  <a:srgbClr val="F5F7FA"/>
-                </a:solidFill>
-                <a:latin typeface="Segoe UI"/>
-              </a:defRPr>
-            </a:pPr>
-            <a:r>
-              <a:t>04. Job Completed (REFRESH): Service settled, database logs archived, and system state refreshed.</a:t>
-            </a:r>
-          </a:p>
-        </p:txBody>
-      </p:sp>
-    </p:spTree>
-  </p:cSld>
-  <p:clrMapOvr>
-    <a:masterClrMapping/>
-  </p:clrMapOvr>
-</p:sld>
-</file>
-
-<file path=ppt/slides/slide6.xml><?xml version="1.0" encoding="utf-8"?>
-<p:sld xmlns:a="http://schemas.openxmlformats.org/drawingml/2006/main" xmlns:p="http://schemas.openxmlformats.org/presentationml/2006/main" xmlns:r="http://schemas.openxmlformats.org/officeDocument/2006/relationships">
-  <p:cSld>
-    <p:bg>
-      <p:bgPr>
-        <a:solidFill>
-          <a:srgbClr val="0A0B14"/>
-        </a:solidFill>
-        <a:effectLst/>
-      </p:bgPr>
-    </p:bg>
-    <p:spTree>
-      <p:nvGrpSpPr>
-        <p:cNvPr id="1" name=""/>
-        <p:cNvGrpSpPr/>
-        <p:nvPr/>
-      </p:nvGrpSpPr>
-      <p:grpSpPr/>
-      <p:sp>
-        <p:nvSpPr>
-          <p:cNvPr id="2" name="TextBox 1"/>
-          <p:cNvSpPr txBox="1"/>
-          <p:nvPr/>
-        </p:nvSpPr>
-        <p:spPr>
-          <a:xfrm>
-            <a:off x="731520" y="457200"/>
-            <a:ext cx="10515600" cy="731520"/>
-          </a:xfrm>
-          <a:prstGeom prst="rect">
-            <a:avLst/>
-          </a:prstGeom>
-          <a:noFill/>
-        </p:spPr>
-        <p:txBody>
-          <a:bodyPr wrap="square">
-            <a:spAutoFit/>
-          </a:bodyPr>
-          <a:lstStyle/>
-          <a:p>
-            <a:pPr>
-              <a:defRPr sz="3600" b="1">
-                <a:solidFill>
-                  <a:srgbClr val="F5F7FA"/>
-                </a:solidFill>
-                <a:latin typeface="Segoe UI"/>
-              </a:defRPr>
-            </a:pPr>
-            <a:r>
-              <a:t>Fulfillment Metrics &amp; Specifications</a:t>
-            </a:r>
-          </a:p>
-        </p:txBody>
-      </p:sp>
-      <p:sp>
-        <p:nvSpPr>
-          <p:cNvPr id="3" name="TextBox 2"/>
-          <p:cNvSpPr txBox="1"/>
-          <p:nvPr/>
-        </p:nvSpPr>
-        <p:spPr>
-          <a:xfrm>
-            <a:off x="731520" y="1463040"/>
-            <a:ext cx="4572000" cy="4389120"/>
-          </a:xfrm>
-          <a:prstGeom prst="rect">
-            <a:avLst/>
-          </a:prstGeom>
-          <a:noFill/>
-        </p:spPr>
-        <p:txBody>
-          <a:bodyPr wrap="square">
-            <a:spAutoFit/>
-          </a:bodyPr>
-          <a:lstStyle/>
-          <a:p>
-            <a:pPr>
-              <a:defRPr sz="1800" b="1">
-                <a:solidFill>
-                  <a:srgbClr val="4285F4"/>
-                </a:solidFill>
-                <a:latin typeface="Segoe UI"/>
-              </a:defRPr>
-            </a:pPr>
-            <a:r>
-              <a:t>OPERATIONAL PERFORMANCE</a:t>
-            </a:r>
-          </a:p>
-          <a:p>
-            <a:pPr>
-              <a:spcAft>
-                <a:spcPts val="1200"/>
-              </a:spcAft>
-              <a:defRPr sz="1500">
-                <a:solidFill>
-                  <a:srgbClr val="F5F7FA"/>
-                </a:solidFill>
-                <a:latin typeface="Segoe UI"/>
-              </a:defRPr>
-            </a:pPr>
-            <a:r>
-              <a:t>Phone Call Towing: 45.0 Mins</a:t>
-            </a:r>
-          </a:p>
-          <a:p>
-            <a:pPr>
-              <a:spcAft>
-                <a:spcPts val="1200"/>
-              </a:spcAft>
-              <a:defRPr sz="1500">
-                <a:solidFill>
-                  <a:srgbClr val="F5F7FA"/>
-                </a:solidFill>
-                <a:latin typeface="Segoe UI"/>
-              </a:defRPr>
-            </a:pPr>
-            <a:r>
-              <a:t>Local Tow Broker: 32.0 Mins</a:t>
-            </a:r>
-          </a:p>
-          <a:p>
-            <a:pPr>
-              <a:spcAft>
-                <a:spcPts val="1200"/>
-              </a:spcAft>
-              <a:defRPr sz="1500">
-                <a:solidFill>
-                  <a:srgbClr val="F5F7FA"/>
-                </a:solidFill>
-                <a:latin typeface="Segoe UI"/>
-              </a:defRPr>
-            </a:pPr>
-            <a:r>
-              <a:t>Insurance Directory: 24.5 Mins</a:t>
-            </a:r>
-          </a:p>
-          <a:p>
-            <a:pPr>
-              <a:spcAft>
-                <a:spcPts val="1200"/>
-              </a:spcAft>
-              <a:defRPr sz="1500">
-                <a:solidFill>
-                  <a:srgbClr val="F5F7FA"/>
-                </a:solidFill>
-                <a:latin typeface="Segoe UI"/>
-              </a:defRPr>
-            </a:pPr>
-            <a:r>
-              <a:t>PitCrew Connect: 12.5 Mins (72% speedup)</a:t>
+              <a:t>Speed &amp; Efficiency Fulfillment</a:t>
             </a:r>
           </a:p>
         </p:txBody>
       </p:sp>
       <p:graphicFrame>
         <p:nvGraphicFramePr>
-          <p:cNvPr id="4" name="Table 3"/>
+          <p:cNvPr id="3" name="Table 2"/>
           <p:cNvGraphicFramePr>
             <a:graphicFrameLocks noGrp="1"/>
           </p:cNvGraphicFramePr>
           <p:nvPr/>
         </p:nvGraphicFramePr>
         <p:xfrm>
-          <a:off x="5669280" y="1463040"/>
-          <a:ext cx="5760720" cy="4114800"/>
+          <a:off x="731520" y="1645920"/>
+          <a:ext cx="10698480" cy="4114800"/>
         </p:xfrm>
         <a:graphic>
           <a:graphicData uri="http://schemas.openxmlformats.org/drawingml/2006/table">
@@ -4137,9 +3291,9 @@
                 <a:tableStyleId>{5C22544A-7EE6-4342-B048-85BDC9FD1C3A}</a:tableStyleId>
               </a:tblPr>
               <a:tblGrid>
-                <a:gridCol w="2103120"/>
-                <a:gridCol w="1828800"/>
-                <a:gridCol w="1828800"/>
+                <a:gridCol w="3383280"/>
+                <a:gridCol w="3657600"/>
+                <a:gridCol w="3657600"/>
               </a:tblGrid>
               <a:tr h="822960">
                 <a:tc>
@@ -4148,7 +3302,7 @@
                     <a:lstStyle/>
                     <a:p>
                       <a:pPr>
-                        <a:defRPr sz="1300" b="1">
+                        <a:defRPr sz="1400" b="1">
                           <a:solidFill>
                             <a:srgbClr val="9B72CB"/>
                           </a:solidFill>
@@ -4168,7 +3322,7 @@
                     <a:lstStyle/>
                     <a:p>
                       <a:pPr>
-                        <a:defRPr sz="1300" b="1">
+                        <a:defRPr sz="1400" b="1">
                           <a:solidFill>
                             <a:srgbClr val="9B72CB"/>
                           </a:solidFill>
@@ -4188,7 +3342,7 @@
                     <a:lstStyle/>
                     <a:p>
                       <a:pPr>
-                        <a:defRPr sz="1300" b="1">
+                        <a:defRPr sz="1400" b="1">
                           <a:solidFill>
                             <a:srgbClr val="9B72CB"/>
                           </a:solidFill>
@@ -4210,7 +3364,7 @@
                     <a:lstStyle/>
                     <a:p>
                       <a:pPr>
-                        <a:defRPr sz="1300">
+                        <a:defRPr sz="1400">
                           <a:solidFill>
                             <a:srgbClr val="F5F7FA"/>
                           </a:solidFill>
@@ -4218,7 +3372,7 @@
                         </a:defRPr>
                       </a:pPr>
                       <a:r>
-                        <a:t>Match Dispatch Speed</a:t>
+                        <a:t>Average Response Time</a:t>
                       </a:r>
                     </a:p>
                   </a:txBody>
@@ -4230,7 +3384,7 @@
                     <a:lstStyle/>
                     <a:p>
                       <a:pPr>
-                        <a:defRPr sz="1300">
+                        <a:defRPr sz="1400">
                           <a:solidFill>
                             <a:srgbClr val="F5F7FA"/>
                           </a:solidFill>
@@ -4238,7 +3392,7 @@
                         </a:defRPr>
                       </a:pPr>
                       <a:r>
-                        <a:t>15-20 Mins</a:t>
+                        <a:t>45.0 Mins (Broker lag)</a:t>
                       </a:r>
                     </a:p>
                   </a:txBody>
@@ -4250,7 +3404,7 @@
                     <a:lstStyle/>
                     <a:p>
                       <a:pPr>
-                        <a:defRPr sz="1300" b="1">
+                        <a:defRPr sz="1400" b="1">
                           <a:solidFill>
                             <a:srgbClr val="D96BBA"/>
                           </a:solidFill>
@@ -4258,7 +3412,7 @@
                         </a:defRPr>
                       </a:pPr>
                       <a:r>
-                        <a:t>2.4 Mins</a:t>
+                        <a:t>12.5 Mins (72% speedup)</a:t>
                       </a:r>
                     </a:p>
                   </a:txBody>
@@ -4272,7 +3426,7 @@
                     <a:lstStyle/>
                     <a:p>
                       <a:pPr>
-                        <a:defRPr sz="1300">
+                        <a:defRPr sz="1400">
                           <a:solidFill>
                             <a:srgbClr val="F5F7FA"/>
                           </a:solidFill>
@@ -4280,7 +3434,7 @@
                         </a:defRPr>
                       </a:pPr>
                       <a:r>
-                        <a:t>Location Accuracy</a:t>
+                        <a:t>GPS Location Tracking</a:t>
                       </a:r>
                     </a:p>
                   </a:txBody>
@@ -4292,7 +3446,7 @@
                     <a:lstStyle/>
                     <a:p>
                       <a:pPr>
-                        <a:defRPr sz="1300">
+                        <a:defRPr sz="1400">
                           <a:solidFill>
                             <a:srgbClr val="F5F7FA"/>
                           </a:solidFill>
@@ -4300,7 +3454,7 @@
                         </a:defRPr>
                       </a:pPr>
                       <a:r>
-                        <a:t>Approximate street</a:t>
+                        <a:t>Approximate street details</a:t>
                       </a:r>
                     </a:p>
                   </a:txBody>
@@ -4312,7 +3466,7 @@
                     <a:lstStyle/>
                     <a:p>
                       <a:pPr>
-                        <a:defRPr sz="1300" b="1">
+                        <a:defRPr sz="1400" b="1">
                           <a:solidFill>
                             <a:srgbClr val="D96BBA"/>
                           </a:solidFill>
@@ -4320,7 +3474,7 @@
                         </a:defRPr>
                       </a:pPr>
                       <a:r>
-                        <a:t>Live GPS Coordinates</a:t>
+                        <a:t>Live Coordinates Routing</a:t>
                       </a:r>
                     </a:p>
                   </a:txBody>
@@ -4334,7 +3488,7 @@
                     <a:lstStyle/>
                     <a:p>
                       <a:pPr>
-                        <a:defRPr sz="1300">
+                        <a:defRPr sz="1400">
                           <a:solidFill>
                             <a:srgbClr val="F5F7FA"/>
                           </a:solidFill>
@@ -4342,7 +3496,7 @@
                         </a:defRPr>
                       </a:pPr>
                       <a:r>
-                        <a:t>Onboarding Check</a:t>
+                        <a:t>Responder Verification</a:t>
                       </a:r>
                     </a:p>
                   </a:txBody>
@@ -4354,7 +3508,7 @@
                     <a:lstStyle/>
                     <a:p>
                       <a:pPr>
-                        <a:defRPr sz="1300">
+                        <a:defRPr sz="1400">
                           <a:solidFill>
                             <a:srgbClr val="F5F7FA"/>
                           </a:solidFill>
@@ -4374,7 +3528,7 @@
                     <a:lstStyle/>
                     <a:p>
                       <a:pPr>
-                        <a:defRPr sz="1300" b="1">
+                        <a:defRPr sz="1400" b="1">
                           <a:solidFill>
                             <a:srgbClr val="D96BBA"/>
                           </a:solidFill>
@@ -4382,7 +3536,7 @@
                         </a:defRPr>
                       </a:pPr>
                       <a:r>
-                        <a:t>Identity Vetted</a:t>
+                        <a:t>Vetted Trade Licenses</a:t>
                       </a:r>
                     </a:p>
                   </a:txBody>
@@ -4396,7 +3550,7 @@
                     <a:lstStyle/>
                     <a:p>
                       <a:pPr>
-                        <a:defRPr sz="1300">
+                        <a:defRPr sz="1400">
                           <a:solidFill>
                             <a:srgbClr val="F5F7FA"/>
                           </a:solidFill>
@@ -4404,7 +3558,7 @@
                         </a:defRPr>
                       </a:pPr>
                       <a:r>
-                        <a:t>Active Uptime</a:t>
+                        <a:t>System Availability</a:t>
                       </a:r>
                     </a:p>
                   </a:txBody>
@@ -4416,7 +3570,7 @@
                     <a:lstStyle/>
                     <a:p>
                       <a:pPr>
-                        <a:defRPr sz="1300">
+                        <a:defRPr sz="1400">
                           <a:solidFill>
                             <a:srgbClr val="F5F7FA"/>
                           </a:solidFill>
@@ -4436,9 +3590,9 @@
                     <a:lstStyle/>
                     <a:p>
                       <a:pPr>
-                        <a:defRPr sz="1300">
+                        <a:defRPr sz="1400" b="1">
                           <a:solidFill>
-                            <a:srgbClr val="F5F7FA"/>
+                            <a:srgbClr val="D96BBA"/>
                           </a:solidFill>
                           <a:latin typeface="Segoe UI"/>
                         </a:defRPr>
@@ -4463,13 +3617,13 @@
 </p:sld>
 </file>
 
-<file path=ppt/slides/slide7.xml><?xml version="1.0" encoding="utf-8"?>
+<file path=ppt/slides/slide11.xml><?xml version="1.0" encoding="utf-8"?>
 <p:sld xmlns:a="http://schemas.openxmlformats.org/drawingml/2006/main" xmlns:p="http://schemas.openxmlformats.org/presentationml/2006/main" xmlns:r="http://schemas.openxmlformats.org/officeDocument/2006/relationships">
   <p:cSld>
     <p:bg>
       <p:bgPr>
         <a:solidFill>
-          <a:srgbClr val="0A0B14"/>
+          <a:srgbClr val="06060C"/>
         </a:solidFill>
         <a:effectLst/>
       </p:bgPr>
@@ -4489,6 +3643,104 @@
         </p:nvSpPr>
         <p:spPr>
           <a:xfrm>
+            <a:off x="914400" y="2560320"/>
+            <a:ext cx="10362895" cy="1645920"/>
+          </a:xfrm>
+          <a:prstGeom prst="rect">
+            <a:avLst/>
+          </a:prstGeom>
+          <a:noFill/>
+        </p:spPr>
+        <p:txBody>
+          <a:bodyPr wrap="square">
+            <a:spAutoFit/>
+          </a:bodyPr>
+          <a:lstStyle/>
+          <a:p>
+            <a:pPr algn="ctr">
+              <a:defRPr sz="6400" b="1">
+                <a:solidFill>
+                  <a:srgbClr val="F5F7FA"/>
+                </a:solidFill>
+                <a:latin typeface="Segoe UI"/>
+              </a:defRPr>
+            </a:pPr>
+            <a:r>
+              <a:t>THANK YOU</a:t>
+            </a:r>
+          </a:p>
+        </p:txBody>
+      </p:sp>
+      <p:sp>
+        <p:nvSpPr>
+          <p:cNvPr id="3" name="TextBox 2"/>
+          <p:cNvSpPr txBox="1"/>
+          <p:nvPr/>
+        </p:nvSpPr>
+        <p:spPr>
+          <a:xfrm>
+            <a:off x="914400" y="3931920"/>
+            <a:ext cx="10362895" cy="914400"/>
+          </a:xfrm>
+          <a:prstGeom prst="rect">
+            <a:avLst/>
+          </a:prstGeom>
+          <a:noFill/>
+        </p:spPr>
+        <p:txBody>
+          <a:bodyPr wrap="square">
+            <a:spAutoFit/>
+          </a:bodyPr>
+          <a:lstStyle/>
+          <a:p>
+            <a:pPr algn="ctr">
+              <a:defRPr sz="2000">
+                <a:solidFill>
+                  <a:srgbClr val="8E9FB6"/>
+                </a:solidFill>
+                <a:latin typeface="Segoe UI"/>
+              </a:defRPr>
+            </a:pPr>
+            <a:r>
+              <a:t>Platform live at: pitcrew-connect.onrender.com</a:t>
+            </a:r>
+          </a:p>
+        </p:txBody>
+      </p:sp>
+    </p:spTree>
+  </p:cSld>
+  <p:clrMapOvr>
+    <a:masterClrMapping/>
+  </p:clrMapOvr>
+</p:sld>
+</file>
+
+<file path=ppt/slides/slide2.xml><?xml version="1.0" encoding="utf-8"?>
+<p:sld xmlns:a="http://schemas.openxmlformats.org/drawingml/2006/main" xmlns:p="http://schemas.openxmlformats.org/presentationml/2006/main" xmlns:r="http://schemas.openxmlformats.org/officeDocument/2006/relationships">
+  <p:cSld>
+    <p:bg>
+      <p:bgPr>
+        <a:solidFill>
+          <a:srgbClr val="06060C"/>
+        </a:solidFill>
+        <a:effectLst/>
+      </p:bgPr>
+    </p:bg>
+    <p:spTree>
+      <p:nvGrpSpPr>
+        <p:cNvPr id="1" name=""/>
+        <p:cNvGrpSpPr/>
+        <p:nvPr/>
+      </p:nvGrpSpPr>
+      <p:grpSpPr/>
+      <p:sp>
+        <p:nvSpPr>
+          <p:cNvPr id="2" name="TextBox 1"/>
+          <p:cNvSpPr txBox="1"/>
+          <p:nvPr/>
+        </p:nvSpPr>
+        <p:spPr>
+          <a:xfrm>
             <a:off x="731520" y="457200"/>
             <a:ext cx="10515600" cy="731520"/>
           </a:xfrm>
@@ -4512,7 +3764,7 @@
               </a:defRPr>
             </a:pPr>
             <a:r>
-              <a:t>Platform Onboarding &amp; Vetting Controls</a:t>
+              <a:t>Roadside Dispatch Bottlenecks</a:t>
             </a:r>
           </a:p>
         </p:txBody>
@@ -4526,7 +3778,7 @@
         <p:spPr>
           <a:xfrm>
             <a:off x="731520" y="1463040"/>
-            <a:ext cx="5303520" cy="4389120"/>
+            <a:ext cx="4937760" cy="4114800"/>
           </a:xfrm>
           <a:prstGeom prst="rect">
             <a:avLst/>
@@ -4548,7 +3800,7 @@
               </a:defRPr>
             </a:pPr>
             <a:r>
-              <a:t>COMPLIANCE VERIFICATION PIPELINE</a:t>
+              <a:t>MONO DISPATCHING (LEGACY CALL)</a:t>
             </a:r>
           </a:p>
           <a:p>
@@ -4556,7 +3808,7 @@
               <a:spcAft>
                 <a:spcPts val="1200"/>
               </a:spcAft>
-              <a:defRPr sz="1400">
+              <a:defRPr sz="1600">
                 <a:solidFill>
                   <a:srgbClr val="F5F7FA"/>
                 </a:solidFill>
@@ -4564,7 +3816,7 @@
               </a:defRPr>
             </a:pPr>
             <a:r>
-              <a:t>01. Upload Credentials: Mechanics submit registration details, trade licenses, and credentials.</a:t>
+              <a:t>Stranded drivers wait on phone brokers to route tickets.</a:t>
             </a:r>
           </a:p>
           <a:p>
@@ -4572,7 +3824,7 @@
               <a:spcAft>
                 <a:spcPts val="1200"/>
               </a:spcAft>
-              <a:defRPr sz="1400">
+              <a:defRPr sz="1600">
                 <a:solidFill>
                   <a:srgbClr val="F5F7FA"/>
                 </a:solidFill>
@@ -4580,7 +3832,7 @@
               </a:defRPr>
             </a:pPr>
             <a:r>
-              <a:t>02. Admin Vetting Audits: Platform admins inspect credentials, check background references, and authorize access.</a:t>
+              <a:t>Locations are explained blindly without live coordinates.</a:t>
             </a:r>
           </a:p>
           <a:p>
@@ -4588,7 +3840,7 @@
               <a:spcAft>
                 <a:spcPts val="1200"/>
               </a:spcAft>
-              <a:defRPr sz="1400">
+              <a:defRPr sz="1600">
                 <a:solidFill>
                   <a:srgbClr val="F5F7FA"/>
                 </a:solidFill>
@@ -4596,7 +3848,7 @@
               </a:defRPr>
             </a:pPr>
             <a:r>
-              <a:t>03. System Activation: Approved profiles unlock active dispatch queues and live client route coordinate requests.</a:t>
+              <a:t>No real-time estimated arrival times (ETAs) or route locking.</a:t>
             </a:r>
           </a:p>
         </p:txBody>
@@ -4609,8 +3861,8 @@
         </p:nvSpPr>
         <p:spPr>
           <a:xfrm>
-            <a:off x="6400800" y="1463040"/>
-            <a:ext cx="5029200" cy="4389120"/>
+            <a:off x="6217920" y="1463040"/>
+            <a:ext cx="4937760" cy="4114800"/>
           </a:xfrm>
           <a:prstGeom prst="rect">
             <a:avLst/>
@@ -4632,7 +3884,7 @@
               </a:defRPr>
             </a:pPr>
             <a:r>
-              <a:t>DATA ENCRYPTION &amp; COMPLIANCE</a:t>
+              <a:t>STEREO INTAKE (CONSOLIDATED PORTALS)</a:t>
             </a:r>
           </a:p>
           <a:p>
@@ -4640,7 +3892,7 @@
               <a:spcAft>
                 <a:spcPts val="1200"/>
               </a:spcAft>
-              <a:defRPr sz="1400">
+              <a:defRPr sz="1600">
                 <a:solidFill>
                   <a:srgbClr val="F5F7FA"/>
                 </a:solidFill>
@@ -4648,7 +3900,7 @@
               </a:defRPr>
             </a:pPr>
             <a:r>
-              <a:t>Account Security: Passwords are encrypted on-disk using high-security bcryptjs hashing algorithms.</a:t>
+              <a:t>Consolidated garage portals search manually.</a:t>
             </a:r>
           </a:p>
           <a:p>
@@ -4656,7 +3908,7 @@
               <a:spcAft>
                 <a:spcPts val="1200"/>
               </a:spcAft>
-              <a:defRPr sz="1400">
+              <a:defRPr sz="1600">
                 <a:solidFill>
                   <a:srgbClr val="F5F7FA"/>
                 </a:solidFill>
@@ -4664,7 +3916,7 @@
               </a:defRPr>
             </a:pPr>
             <a:r>
-              <a:t>Role Isolation: Strict middleware limits database query endpoints to matched mechanic accounts.</a:t>
+              <a:t>Coordinates are relayed via text messages without vector maps.</a:t>
             </a:r>
           </a:p>
           <a:p>
@@ -4672,7 +3924,7 @@
               <a:spcAft>
                 <a:spcPts val="1200"/>
               </a:spcAft>
-              <a:defRPr sz="1400">
+              <a:defRPr sz="1600">
                 <a:solidFill>
                   <a:srgbClr val="F5F7FA"/>
                 </a:solidFill>
@@ -4680,15 +3932,100 @@
               </a:defRPr>
             </a:pPr>
             <a:r>
-              <a:t>Compliance: Operational audit logs track completed jobs, invoices, and verified matches.</a:t>
-            </a:r>
-          </a:p>
+              <a:t>High responder matching lag due to manual dispatcher routing.</a:t>
+            </a:r>
+          </a:p>
+        </p:txBody>
+      </p:sp>
+    </p:spTree>
+  </p:cSld>
+  <p:clrMapOvr>
+    <a:masterClrMapping/>
+  </p:clrMapOvr>
+</p:sld>
+</file>
+
+<file path=ppt/slides/slide3.xml><?xml version="1.0" encoding="utf-8"?>
+<p:sld xmlns:a="http://schemas.openxmlformats.org/drawingml/2006/main" xmlns:p="http://schemas.openxmlformats.org/presentationml/2006/main" xmlns:r="http://schemas.openxmlformats.org/officeDocument/2006/relationships">
+  <p:cSld>
+    <p:bg>
+      <p:bgPr>
+        <a:solidFill>
+          <a:srgbClr val="06060C"/>
+        </a:solidFill>
+        <a:effectLst/>
+      </p:bgPr>
+    </p:bg>
+    <p:spTree>
+      <p:nvGrpSpPr>
+        <p:cNvPr id="1" name=""/>
+        <p:cNvGrpSpPr/>
+        <p:nvPr/>
+      </p:nvGrpSpPr>
+      <p:grpSpPr/>
+      <p:sp>
+        <p:nvSpPr>
+          <p:cNvPr id="2" name="TextBox 1"/>
+          <p:cNvSpPr txBox="1"/>
+          <p:nvPr/>
+        </p:nvSpPr>
+        <p:spPr>
+          <a:xfrm>
+            <a:off x="731520" y="457200"/>
+            <a:ext cx="10515600" cy="731520"/>
+          </a:xfrm>
+          <a:prstGeom prst="rect">
+            <a:avLst/>
+          </a:prstGeom>
+          <a:noFill/>
+        </p:spPr>
+        <p:txBody>
+          <a:bodyPr wrap="square">
+            <a:spAutoFit/>
+          </a:bodyPr>
+          <a:lstStyle/>
+          <a:p>
+            <a:pPr>
+              <a:defRPr sz="3600" b="1">
+                <a:solidFill>
+                  <a:srgbClr val="F5F7FA"/>
+                </a:solidFill>
+                <a:latin typeface="Segoe UI"/>
+              </a:defRPr>
+            </a:pPr>
+            <a:r>
+              <a:t>Regional Dispatch Nodes</a:t>
+            </a:r>
+          </a:p>
+        </p:txBody>
+      </p:sp>
+      <p:sp>
+        <p:nvSpPr>
+          <p:cNvPr id="3" name="TextBox 2"/>
+          <p:cNvSpPr txBox="1"/>
+          <p:nvPr/>
+        </p:nvSpPr>
+        <p:spPr>
+          <a:xfrm>
+            <a:off x="731520" y="1463040"/>
+            <a:ext cx="10515600" cy="4389120"/>
+          </a:xfrm>
+          <a:prstGeom prst="rect">
+            <a:avLst/>
+          </a:prstGeom>
+          <a:noFill/>
+        </p:spPr>
+        <p:txBody>
+          <a:bodyPr wrap="square">
+            <a:spAutoFit/>
+          </a:bodyPr>
+          <a:lstStyle/>
           <a:p>
             <a:pPr>
               <a:spcAft>
-                <a:spcPts val="1200"/>
+                <a:spcPts val="1400"/>
               </a:spcAft>
-              <a:defRPr sz="1400">
+              <a:defRPr sz="1800">
                 <a:solidFill>
                   <a:srgbClr val="F5F7FA"/>
                 </a:solidFill>
@@ -4696,7 +4033,587 @@
               </a:defRPr>
             </a:pPr>
             <a:r>
-              <a:t>Hosted live: pitcrew-connect.onrender.com</a:t>
+              <a:t>Multi-channel Network: Coordinates are mapped across five regional dispatch towers.</a:t>
+            </a:r>
+          </a:p>
+          <a:p>
+            <a:pPr>
+              <a:spcAft>
+                <a:spcPts val="1400"/>
+              </a:spcAft>
+              <a:defRPr sz="1800">
+                <a:solidFill>
+                  <a:srgbClr val="F5F7FA"/>
+                </a:solidFill>
+                <a:latin typeface="Segoe UI"/>
+              </a:defRPr>
+            </a:pPr>
+            <a:r>
+              <a:t>Proximity Matching: Incident coordinate nodes alert closest responders within their range.</a:t>
+            </a:r>
+          </a:p>
+          <a:p>
+            <a:pPr>
+              <a:spcAft>
+                <a:spcPts val="1400"/>
+              </a:spcAft>
+              <a:defRPr sz="1800">
+                <a:solidFill>
+                  <a:srgbClr val="F5F7FA"/>
+                </a:solidFill>
+                <a:latin typeface="Segoe UI"/>
+              </a:defRPr>
+            </a:pPr>
+            <a:r>
+              <a:t>Active Ledger: Database indexes dispatcher routes and tracks incident paths dynamically.</a:t>
+            </a:r>
+          </a:p>
+        </p:txBody>
+      </p:sp>
+    </p:spTree>
+  </p:cSld>
+  <p:clrMapOvr>
+    <a:masterClrMapping/>
+  </p:clrMapOvr>
+</p:sld>
+</file>
+
+<file path=ppt/slides/slide4.xml><?xml version="1.0" encoding="utf-8"?>
+<p:sld xmlns:a="http://schemas.openxmlformats.org/drawingml/2006/main" xmlns:p="http://schemas.openxmlformats.org/presentationml/2006/main" xmlns:r="http://schemas.openxmlformats.org/officeDocument/2006/relationships">
+  <p:cSld>
+    <p:bg>
+      <p:bgPr>
+        <a:solidFill>
+          <a:srgbClr val="06060C"/>
+        </a:solidFill>
+        <a:effectLst/>
+      </p:bgPr>
+    </p:bg>
+    <p:spTree>
+      <p:nvGrpSpPr>
+        <p:cNvPr id="1" name=""/>
+        <p:cNvGrpSpPr/>
+        <p:nvPr/>
+      </p:nvGrpSpPr>
+      <p:grpSpPr/>
+      <p:sp>
+        <p:nvSpPr>
+          <p:cNvPr id="2" name="TextBox 1"/>
+          <p:cNvSpPr txBox="1"/>
+          <p:nvPr/>
+        </p:nvSpPr>
+        <p:spPr>
+          <a:xfrm>
+            <a:off x="731520" y="457200"/>
+            <a:ext cx="10515600" cy="731520"/>
+          </a:xfrm>
+          <a:prstGeom prst="rect">
+            <a:avLst/>
+          </a:prstGeom>
+          <a:noFill/>
+        </p:spPr>
+        <p:txBody>
+          <a:bodyPr wrap="square">
+            <a:spAutoFit/>
+          </a:bodyPr>
+          <a:lstStyle/>
+          <a:p>
+            <a:pPr>
+              <a:defRPr sz="3600" b="1">
+                <a:solidFill>
+                  <a:srgbClr val="F5F7FA"/>
+                </a:solidFill>
+                <a:latin typeface="Segoe UI"/>
+              </a:defRPr>
+            </a:pPr>
+            <a:r>
+              <a:t>Roadside Dispatch Evolution</a:t>
+            </a:r>
+          </a:p>
+        </p:txBody>
+      </p:sp>
+      <p:sp>
+        <p:nvSpPr>
+          <p:cNvPr id="3" name="TextBox 2"/>
+          <p:cNvSpPr txBox="1"/>
+          <p:nvPr/>
+        </p:nvSpPr>
+        <p:spPr>
+          <a:xfrm>
+            <a:off x="731520" y="1463040"/>
+            <a:ext cx="10515600" cy="4389120"/>
+          </a:xfrm>
+          <a:prstGeom prst="rect">
+            <a:avLst/>
+          </a:prstGeom>
+          <a:noFill/>
+        </p:spPr>
+        <p:txBody>
+          <a:bodyPr wrap="square">
+            <a:spAutoFit/>
+          </a:bodyPr>
+          <a:lstStyle/>
+          <a:p>
+            <a:pPr>
+              <a:spcAft>
+                <a:spcPts val="1400"/>
+              </a:spcAft>
+              <a:defRPr sz="1800">
+                <a:solidFill>
+                  <a:srgbClr val="F5F7FA"/>
+                </a:solidFill>
+                <a:latin typeface="Segoe UI"/>
+              </a:defRPr>
+            </a:pPr>
+            <a:r>
+              <a:t>Before 2010: Offline Systems — Paper business listings, directories, and telephone call lines.</a:t>
+            </a:r>
+          </a:p>
+          <a:p>
+            <a:pPr>
+              <a:spcAft>
+                <a:spcPts val="1400"/>
+              </a:spcAft>
+              <a:defRPr sz="1800">
+                <a:solidFill>
+                  <a:srgbClr val="F5F7FA"/>
+                </a:solidFill>
+                <a:latin typeface="Segoe UI"/>
+              </a:defRPr>
+            </a:pPr>
+            <a:r>
+              <a:t>2015: Static Listings — Web listings. Drivers search, call, and explain coordinates blindly.</a:t>
+            </a:r>
+          </a:p>
+          <a:p>
+            <a:pPr>
+              <a:spcAft>
+                <a:spcPts val="1400"/>
+              </a:spcAft>
+              <a:defRPr sz="1800">
+                <a:solidFill>
+                  <a:srgbClr val="F5F7FA"/>
+                </a:solidFill>
+                <a:latin typeface="Segoe UI"/>
+              </a:defRPr>
+            </a:pPr>
+            <a:r>
+              <a:t>2020: Consolidated Portals — Static booking portals suffer from manual assignment lag.</a:t>
+            </a:r>
+          </a:p>
+          <a:p>
+            <a:pPr>
+              <a:spcAft>
+                <a:spcPts val="1400"/>
+              </a:spcAft>
+              <a:defRPr sz="1800">
+                <a:solidFill>
+                  <a:srgbClr val="F5F7FA"/>
+                </a:solidFill>
+                <a:latin typeface="Segoe UI"/>
+              </a:defRPr>
+            </a:pPr>
+            <a:r>
+              <a:t>2026+: PitCrew Connect — Automated coordinate intake, vetting, and live map tracking.</a:t>
+            </a:r>
+          </a:p>
+        </p:txBody>
+      </p:sp>
+    </p:spTree>
+  </p:cSld>
+  <p:clrMapOvr>
+    <a:masterClrMapping/>
+  </p:clrMapOvr>
+</p:sld>
+</file>
+
+<file path=ppt/slides/slide5.xml><?xml version="1.0" encoding="utf-8"?>
+<p:sld xmlns:a="http://schemas.openxmlformats.org/drawingml/2006/main" xmlns:p="http://schemas.openxmlformats.org/presentationml/2006/main" xmlns:r="http://schemas.openxmlformats.org/officeDocument/2006/relationships">
+  <p:cSld>
+    <p:bg>
+      <p:bgPr>
+        <a:solidFill>
+          <a:srgbClr val="06060C"/>
+        </a:solidFill>
+        <a:effectLst/>
+      </p:bgPr>
+    </p:bg>
+    <p:spTree>
+      <p:nvGrpSpPr>
+        <p:cNvPr id="1" name=""/>
+        <p:cNvGrpSpPr/>
+        <p:nvPr/>
+      </p:nvGrpSpPr>
+      <p:grpSpPr/>
+      <p:sp>
+        <p:nvSpPr>
+          <p:cNvPr id="2" name="TextBox 1"/>
+          <p:cNvSpPr txBox="1"/>
+          <p:nvPr/>
+        </p:nvSpPr>
+        <p:spPr>
+          <a:xfrm>
+            <a:off x="731520" y="457200"/>
+            <a:ext cx="10515600" cy="731520"/>
+          </a:xfrm>
+          <a:prstGeom prst="rect">
+            <a:avLst/>
+          </a:prstGeom>
+          <a:noFill/>
+        </p:spPr>
+        <p:txBody>
+          <a:bodyPr wrap="square">
+            <a:spAutoFit/>
+          </a:bodyPr>
+          <a:lstStyle/>
+          <a:p>
+            <a:pPr>
+              <a:defRPr sz="3600" b="1">
+                <a:solidFill>
+                  <a:srgbClr val="F5F7FA"/>
+                </a:solidFill>
+                <a:latin typeface="Segoe UI"/>
+              </a:defRPr>
+            </a:pPr>
+            <a:r>
+              <a:t>Dynamic Coordinate Objects</a:t>
+            </a:r>
+          </a:p>
+        </p:txBody>
+      </p:sp>
+      <p:sp>
+        <p:nvSpPr>
+          <p:cNvPr id="3" name="TextBox 2"/>
+          <p:cNvSpPr txBox="1"/>
+          <p:nvPr/>
+        </p:nvSpPr>
+        <p:spPr>
+          <a:xfrm>
+            <a:off x="731520" y="1463040"/>
+            <a:ext cx="10515600" cy="4389120"/>
+          </a:xfrm>
+          <a:prstGeom prst="rect">
+            <a:avLst/>
+          </a:prstGeom>
+          <a:noFill/>
+        </p:spPr>
+        <p:txBody>
+          <a:bodyPr wrap="square">
+            <a:spAutoFit/>
+          </a:bodyPr>
+          <a:lstStyle/>
+          <a:p>
+            <a:pPr>
+              <a:spcAft>
+                <a:spcPts val="1400"/>
+              </a:spcAft>
+              <a:defRPr sz="1800">
+                <a:solidFill>
+                  <a:srgbClr val="F5F7FA"/>
+                </a:solidFill>
+                <a:latin typeface="Segoe UI"/>
+              </a:defRPr>
+            </a:pPr>
+            <a:r>
+              <a:t>Driver Coordinate Node: Stranded vehicle position is tracked as a live coordinate object.</a:t>
+            </a:r>
+          </a:p>
+          <a:p>
+            <a:pPr>
+              <a:spcAft>
+                <a:spcPts val="1400"/>
+              </a:spcAft>
+              <a:defRPr sz="1800">
+                <a:solidFill>
+                  <a:srgbClr val="F5F7FA"/>
+                </a:solidFill>
+                <a:latin typeface="Segoe UI"/>
+              </a:defRPr>
+            </a:pPr>
+            <a:r>
+              <a:t>Real-Time Panning: Coordinates, bearing vectors, and distances recalculate as objects shift on-stage.</a:t>
+            </a:r>
+          </a:p>
+          <a:p>
+            <a:pPr>
+              <a:spcAft>
+                <a:spcPts val="1400"/>
+              </a:spcAft>
+              <a:defRPr sz="1800">
+                <a:solidFill>
+                  <a:srgbClr val="F5F7FA"/>
+                </a:solidFill>
+                <a:latin typeface="Segoe UI"/>
+              </a:defRPr>
+            </a:pPr>
+            <a:r>
+              <a:t>Automatic Dispatch Updates: The server pushes coordinate adjustments instantly to matched mechanic screens.</a:t>
+            </a:r>
+          </a:p>
+        </p:txBody>
+      </p:sp>
+    </p:spTree>
+  </p:cSld>
+  <p:clrMapOvr>
+    <a:masterClrMapping/>
+  </p:clrMapOvr>
+</p:sld>
+</file>
+
+<file path=ppt/slides/slide6.xml><?xml version="1.0" encoding="utf-8"?>
+<p:sld xmlns:a="http://schemas.openxmlformats.org/drawingml/2006/main" xmlns:p="http://schemas.openxmlformats.org/presentationml/2006/main" xmlns:r="http://schemas.openxmlformats.org/officeDocument/2006/relationships">
+  <p:cSld>
+    <p:bg>
+      <p:bgPr>
+        <a:solidFill>
+          <a:srgbClr val="06060C"/>
+        </a:solidFill>
+        <a:effectLst/>
+      </p:bgPr>
+    </p:bg>
+    <p:spTree>
+      <p:nvGrpSpPr>
+        <p:cNvPr id="1" name=""/>
+        <p:cNvGrpSpPr/>
+        <p:nvPr/>
+      </p:nvGrpSpPr>
+      <p:grpSpPr/>
+      <p:sp>
+        <p:nvSpPr>
+          <p:cNvPr id="2" name="TextBox 1"/>
+          <p:cNvSpPr txBox="1"/>
+          <p:nvPr/>
+        </p:nvSpPr>
+        <p:spPr>
+          <a:xfrm>
+            <a:off x="731520" y="457200"/>
+            <a:ext cx="10515600" cy="731520"/>
+          </a:xfrm>
+          <a:prstGeom prst="rect">
+            <a:avLst/>
+          </a:prstGeom>
+          <a:noFill/>
+        </p:spPr>
+        <p:txBody>
+          <a:bodyPr wrap="square">
+            <a:spAutoFit/>
+          </a:bodyPr>
+          <a:lstStyle/>
+          <a:p>
+            <a:pPr>
+              <a:defRPr sz="3600" b="1">
+                <a:solidFill>
+                  <a:srgbClr val="F5F7FA"/>
+                </a:solidFill>
+                <a:latin typeface="Segoe UI"/>
+              </a:defRPr>
+            </a:pPr>
+            <a:r>
+              <a:t>Layered System Architecture</a:t>
+            </a:r>
+          </a:p>
+        </p:txBody>
+      </p:sp>
+      <p:sp>
+        <p:nvSpPr>
+          <p:cNvPr id="3" name="TextBox 2"/>
+          <p:cNvSpPr txBox="1"/>
+          <p:nvPr/>
+        </p:nvSpPr>
+        <p:spPr>
+          <a:xfrm>
+            <a:off x="731520" y="1463040"/>
+            <a:ext cx="10515600" cy="4389120"/>
+          </a:xfrm>
+          <a:prstGeom prst="rect">
+            <a:avLst/>
+          </a:prstGeom>
+          <a:noFill/>
+        </p:spPr>
+        <p:txBody>
+          <a:bodyPr wrap="square">
+            <a:spAutoFit/>
+          </a:bodyPr>
+          <a:lstStyle/>
+          <a:p>
+            <a:pPr>
+              <a:spcAft>
+                <a:spcPts val="1400"/>
+              </a:spcAft>
+              <a:defRPr sz="1800">
+                <a:solidFill>
+                  <a:srgbClr val="F5F7FA"/>
+                </a:solidFill>
+                <a:latin typeface="Segoe UI"/>
+              </a:defRPr>
+            </a:pPr>
+            <a:r>
+              <a:t>Client Frontend View: Passenger-facing UI captures coords and details using browser APIs.</a:t>
+            </a:r>
+          </a:p>
+          <a:p>
+            <a:pPr>
+              <a:spcAft>
+                <a:spcPts val="1400"/>
+              </a:spcAft>
+              <a:defRPr sz="1800">
+                <a:solidFill>
+                  <a:srgbClr val="F5F7FA"/>
+                </a:solidFill>
+                <a:latin typeface="Segoe UI"/>
+              </a:defRPr>
+            </a:pPr>
+            <a:r>
+              <a:t>Node.js Backend Server: Express scheduling core. Routes coordinate payloads and socket logs.</a:t>
+            </a:r>
+          </a:p>
+          <a:p>
+            <a:pPr>
+              <a:spcAft>
+                <a:spcPts val="1400"/>
+              </a:spcAft>
+              <a:defRPr sz="1800">
+                <a:solidFill>
+                  <a:srgbClr val="F5F7FA"/>
+                </a:solidFill>
+                <a:latin typeface="Segoe UI"/>
+              </a:defRPr>
+            </a:pPr>
+            <a:r>
+              <a:t>PostgreSQL Storage Tier: The relational storage engine. Secures sessions, logs, and account records.</a:t>
+            </a:r>
+          </a:p>
+        </p:txBody>
+      </p:sp>
+    </p:spTree>
+  </p:cSld>
+  <p:clrMapOvr>
+    <a:masterClrMapping/>
+  </p:clrMapOvr>
+</p:sld>
+</file>
+
+<file path=ppt/slides/slide7.xml><?xml version="1.0" encoding="utf-8"?>
+<p:sld xmlns:a="http://schemas.openxmlformats.org/drawingml/2006/main" xmlns:p="http://schemas.openxmlformats.org/presentationml/2006/main" xmlns:r="http://schemas.openxmlformats.org/officeDocument/2006/relationships">
+  <p:cSld>
+    <p:bg>
+      <p:bgPr>
+        <a:solidFill>
+          <a:srgbClr val="06060C"/>
+        </a:solidFill>
+        <a:effectLst/>
+      </p:bgPr>
+    </p:bg>
+    <p:spTree>
+      <p:nvGrpSpPr>
+        <p:cNvPr id="1" name=""/>
+        <p:cNvGrpSpPr/>
+        <p:nvPr/>
+      </p:nvGrpSpPr>
+      <p:grpSpPr/>
+      <p:sp>
+        <p:nvSpPr>
+          <p:cNvPr id="2" name="TextBox 1"/>
+          <p:cNvSpPr txBox="1"/>
+          <p:nvPr/>
+        </p:nvSpPr>
+        <p:spPr>
+          <a:xfrm>
+            <a:off x="731520" y="457200"/>
+            <a:ext cx="10515600" cy="731520"/>
+          </a:xfrm>
+          <a:prstGeom prst="rect">
+            <a:avLst/>
+          </a:prstGeom>
+          <a:noFill/>
+        </p:spPr>
+        <p:txBody>
+          <a:bodyPr wrap="square">
+            <a:spAutoFit/>
+          </a:bodyPr>
+          <a:lstStyle/>
+          <a:p>
+            <a:pPr>
+              <a:defRPr sz="3600" b="1">
+                <a:solidFill>
+                  <a:srgbClr val="F5F7FA"/>
+                </a:solidFill>
+                <a:latin typeface="Segoe UI"/>
+              </a:defRPr>
+            </a:pPr>
+            <a:r>
+              <a:t>Radius Availability Matching</a:t>
+            </a:r>
+          </a:p>
+        </p:txBody>
+      </p:sp>
+      <p:sp>
+        <p:nvSpPr>
+          <p:cNvPr id="3" name="TextBox 2"/>
+          <p:cNvSpPr txBox="1"/>
+          <p:nvPr/>
+        </p:nvSpPr>
+        <p:spPr>
+          <a:xfrm>
+            <a:off x="731520" y="1463040"/>
+            <a:ext cx="10515600" cy="4389120"/>
+          </a:xfrm>
+          <a:prstGeom prst="rect">
+            <a:avLst/>
+          </a:prstGeom>
+          <a:noFill/>
+        </p:spPr>
+        <p:txBody>
+          <a:bodyPr wrap="square">
+            <a:spAutoFit/>
+          </a:bodyPr>
+          <a:lstStyle/>
+          <a:p>
+            <a:pPr>
+              <a:spcAft>
+                <a:spcPts val="1400"/>
+              </a:spcAft>
+              <a:defRPr sz="1800">
+                <a:solidFill>
+                  <a:srgbClr val="F5F7FA"/>
+                </a:solidFill>
+                <a:latin typeface="Segoe UI"/>
+              </a:defRPr>
+            </a:pPr>
+            <a:r>
+              <a:t>Active Dispatch Circle: Alerts are broadcasted dynamically to mechanics within active states.</a:t>
+            </a:r>
+          </a:p>
+          <a:p>
+            <a:pPr>
+              <a:spcAft>
+                <a:spcPts val="1400"/>
+              </a:spcAft>
+              <a:defRPr sz="1800">
+                <a:solidFill>
+                  <a:srgbClr val="F5F7FA"/>
+                </a:solidFill>
+                <a:latin typeface="Segoe UI"/>
+              </a:defRPr>
+            </a:pPr>
+            <a:r>
+              <a:t>Distance Proximity Logic: The server matches tickets with closest coordinates to cut response lag.</a:t>
+            </a:r>
+          </a:p>
+          <a:p>
+            <a:pPr>
+              <a:spcAft>
+                <a:spcPts val="1400"/>
+              </a:spcAft>
+              <a:defRPr sz="1800">
+                <a:solidFill>
+                  <a:srgbClr val="F5F7FA"/>
+                </a:solidFill>
+                <a:latin typeface="Segoe UI"/>
+              </a:defRPr>
+            </a:pPr>
+            <a:r>
+              <a:t>Scale Optimization: Matching radius scales adaptively to regional responder density trends.</a:t>
             </a:r>
           </a:p>
         </p:txBody>
@@ -4715,7 +4632,7 @@
     <p:bg>
       <p:bgPr>
         <a:solidFill>
-          <a:srgbClr val="0A0B14"/>
+          <a:srgbClr val="06060C"/>
         </a:solidFill>
         <a:effectLst/>
       </p:bgPr>
@@ -4735,8 +4652,8 @@
         </p:nvSpPr>
         <p:spPr>
           <a:xfrm>
-            <a:off x="914400" y="2560320"/>
-            <a:ext cx="10362895" cy="1645920"/>
+            <a:off x="731520" y="457200"/>
+            <a:ext cx="10515600" cy="731520"/>
           </a:xfrm>
           <a:prstGeom prst="rect">
             <a:avLst/>
@@ -4749,8 +4666,8 @@
           </a:bodyPr>
           <a:lstStyle/>
           <a:p>
-            <a:pPr algn="ctr">
-              <a:defRPr sz="6400" b="1">
+            <a:pPr>
+              <a:defRPr sz="3600" b="1">
                 <a:solidFill>
                   <a:srgbClr val="F5F7FA"/>
                 </a:solidFill>
@@ -4758,7 +4675,308 @@
               </a:defRPr>
             </a:pPr>
             <a:r>
-              <a:t>THANK YOU</a:t>
+              <a:t>Under the Hood: The Dispatcher</a:t>
+            </a:r>
+          </a:p>
+        </p:txBody>
+      </p:sp>
+      <p:sp>
+        <p:nvSpPr>
+          <p:cNvPr id="3" name="TextBox 2"/>
+          <p:cNvSpPr txBox="1"/>
+          <p:nvPr/>
+        </p:nvSpPr>
+        <p:spPr>
+          <a:xfrm>
+            <a:off x="731520" y="1463040"/>
+            <a:ext cx="10515600" cy="4389120"/>
+          </a:xfrm>
+          <a:prstGeom prst="rect">
+            <a:avLst/>
+          </a:prstGeom>
+          <a:noFill/>
+        </p:spPr>
+        <p:txBody>
+          <a:bodyPr wrap="square">
+            <a:spAutoFit/>
+          </a:bodyPr>
+          <a:lstStyle/>
+          <a:p>
+            <a:pPr>
+              <a:spcAft>
+                <a:spcPts val="1400"/>
+              </a:spcAft>
+              <a:defRPr sz="1800">
+                <a:solidFill>
+                  <a:srgbClr val="F5F7FA"/>
+                </a:solidFill>
+                <a:latin typeface="Segoe UI"/>
+              </a:defRPr>
+            </a:pPr>
+            <a:r>
+              <a:t>REST Middleware: Token validation headers authenticate mechanic requests to coordinate paths.</a:t>
+            </a:r>
+          </a:p>
+          <a:p>
+            <a:pPr>
+              <a:spcAft>
+                <a:spcPts val="1400"/>
+              </a:spcAft>
+              <a:defRPr sz="1800">
+                <a:solidFill>
+                  <a:srgbClr val="F5F7FA"/>
+                </a:solidFill>
+                <a:latin typeface="Segoe UI"/>
+              </a:defRPr>
+            </a:pPr>
+            <a:r>
+              <a:t>WebSocket Feeds: The dispatcher server broadcasts coordinates to active responder screens.</a:t>
+            </a:r>
+          </a:p>
+          <a:p>
+            <a:pPr>
+              <a:spcAft>
+                <a:spcPts val="1400"/>
+              </a:spcAft>
+              <a:defRPr sz="1800">
+                <a:solidFill>
+                  <a:srgbClr val="F5F7FA"/>
+                </a:solidFill>
+                <a:latin typeface="Segoe UI"/>
+              </a:defRPr>
+            </a:pPr>
+            <a:r>
+              <a:t>Job Match Persistence: Match logs are archived instantly in the Postgres database store.</a:t>
+            </a:r>
+          </a:p>
+        </p:txBody>
+      </p:sp>
+    </p:spTree>
+  </p:cSld>
+  <p:clrMapOvr>
+    <a:masterClrMapping/>
+  </p:clrMapOvr>
+</p:sld>
+</file>
+
+<file path=ppt/slides/slide9.xml><?xml version="1.0" encoding="utf-8"?>
+<p:sld xmlns:a="http://schemas.openxmlformats.org/drawingml/2006/main" xmlns:p="http://schemas.openxmlformats.org/presentationml/2006/main" xmlns:r="http://schemas.openxmlformats.org/officeDocument/2006/relationships">
+  <p:cSld>
+    <p:bg>
+      <p:bgPr>
+        <a:solidFill>
+          <a:srgbClr val="06060C"/>
+        </a:solidFill>
+        <a:effectLst/>
+      </p:bgPr>
+    </p:bg>
+    <p:spTree>
+      <p:nvGrpSpPr>
+        <p:cNvPr id="1" name=""/>
+        <p:cNvGrpSpPr/>
+        <p:nvPr/>
+      </p:nvGrpSpPr>
+      <p:grpSpPr/>
+      <p:sp>
+        <p:nvSpPr>
+          <p:cNvPr id="2" name="TextBox 1"/>
+          <p:cNvSpPr txBox="1"/>
+          <p:nvPr/>
+        </p:nvSpPr>
+        <p:spPr>
+          <a:xfrm>
+            <a:off x="731520" y="457200"/>
+            <a:ext cx="10515600" cy="731520"/>
+          </a:xfrm>
+          <a:prstGeom prst="rect">
+            <a:avLst/>
+          </a:prstGeom>
+          <a:noFill/>
+        </p:spPr>
+        <p:txBody>
+          <a:bodyPr wrap="square">
+            <a:spAutoFit/>
+          </a:bodyPr>
+          <a:lstStyle/>
+          <a:p>
+            <a:pPr>
+              <a:defRPr sz="3600" b="1">
+                <a:solidFill>
+                  <a:srgbClr val="F5F7FA"/>
+                </a:solidFill>
+                <a:latin typeface="Segoe UI"/>
+              </a:defRPr>
+            </a:pPr>
+            <a:r>
+              <a:t>Security &amp; Vetting Controls</a:t>
+            </a:r>
+          </a:p>
+        </p:txBody>
+      </p:sp>
+      <p:sp>
+        <p:nvSpPr>
+          <p:cNvPr id="3" name="TextBox 2"/>
+          <p:cNvSpPr txBox="1"/>
+          <p:nvPr/>
+        </p:nvSpPr>
+        <p:spPr>
+          <a:xfrm>
+            <a:off x="731520" y="1463040"/>
+            <a:ext cx="5303520" cy="4389120"/>
+          </a:xfrm>
+          <a:prstGeom prst="rect">
+            <a:avLst/>
+          </a:prstGeom>
+          <a:noFill/>
+        </p:spPr>
+        <p:txBody>
+          <a:bodyPr wrap="square">
+            <a:spAutoFit/>
+          </a:bodyPr>
+          <a:lstStyle/>
+          <a:p>
+            <a:pPr>
+              <a:defRPr sz="1800" b="1">
+                <a:solidFill>
+                  <a:srgbClr val="4285F4"/>
+                </a:solidFill>
+                <a:latin typeface="Segoe UI"/>
+              </a:defRPr>
+            </a:pPr>
+            <a:r>
+              <a:t>VETTING &amp; COMPLIANCE PIPELINE</a:t>
+            </a:r>
+          </a:p>
+          <a:p>
+            <a:pPr>
+              <a:spcAft>
+                <a:spcPts val="1200"/>
+              </a:spcAft>
+              <a:defRPr sz="1400">
+                <a:solidFill>
+                  <a:srgbClr val="F5F7FA"/>
+                </a:solidFill>
+                <a:latin typeface="Segoe UI"/>
+              </a:defRPr>
+            </a:pPr>
+            <a:r>
+              <a:t>Responders submit trade licenses, identity, and garage details.</a:t>
+            </a:r>
+          </a:p>
+          <a:p>
+            <a:pPr>
+              <a:spcAft>
+                <a:spcPts val="1200"/>
+              </a:spcAft>
+              <a:defRPr sz="1400">
+                <a:solidFill>
+                  <a:srgbClr val="F5F7FA"/>
+                </a:solidFill>
+                <a:latin typeface="Segoe UI"/>
+              </a:defRPr>
+            </a:pPr>
+            <a:r>
+              <a:t>Platform admins verify details before unlocking active coordinates queues.</a:t>
+            </a:r>
+          </a:p>
+          <a:p>
+            <a:pPr>
+              <a:spcAft>
+                <a:spcPts val="1200"/>
+              </a:spcAft>
+              <a:defRPr sz="1400">
+                <a:solidFill>
+                  <a:srgbClr val="F5F7FA"/>
+                </a:solidFill>
+                <a:latin typeface="Segoe UI"/>
+              </a:defRPr>
+            </a:pPr>
+            <a:r>
+              <a:t>Only vetted and active accounts can accept roadside coordination tasks.</a:t>
+            </a:r>
+          </a:p>
+        </p:txBody>
+      </p:sp>
+      <p:sp>
+        <p:nvSpPr>
+          <p:cNvPr id="4" name="TextBox 3"/>
+          <p:cNvSpPr txBox="1"/>
+          <p:nvPr/>
+        </p:nvSpPr>
+        <p:spPr>
+          <a:xfrm>
+            <a:off x="6400800" y="1463040"/>
+            <a:ext cx="5029200" cy="4389120"/>
+          </a:xfrm>
+          <a:prstGeom prst="rect">
+            <a:avLst/>
+          </a:prstGeom>
+          <a:noFill/>
+        </p:spPr>
+        <p:txBody>
+          <a:bodyPr wrap="square">
+            <a:spAutoFit/>
+          </a:bodyPr>
+          <a:lstStyle/>
+          <a:p>
+            <a:pPr>
+              <a:defRPr sz="1800" b="1">
+                <a:solidFill>
+                  <a:srgbClr val="D96BBA"/>
+                </a:solidFill>
+                <a:latin typeface="Segoe UI"/>
+              </a:defRPr>
+            </a:pPr>
+            <a:r>
+              <a:t>DATA ENCRYPTION STANDARDS</a:t>
+            </a:r>
+          </a:p>
+          <a:p>
+            <a:pPr>
+              <a:spcAft>
+                <a:spcPts val="1200"/>
+              </a:spcAft>
+              <a:defRPr sz="1400">
+                <a:solidFill>
+                  <a:srgbClr val="F5F7FA"/>
+                </a:solidFill>
+                <a:latin typeface="Segoe UI"/>
+              </a:defRPr>
+            </a:pPr>
+            <a:r>
+              <a:t>Passwords on-disk are encrypted using robust bcryptjs hashing algorithms.</a:t>
+            </a:r>
+          </a:p>
+          <a:p>
+            <a:pPr>
+              <a:spcAft>
+                <a:spcPts val="1200"/>
+              </a:spcAft>
+              <a:defRPr sz="1400">
+                <a:solidFill>
+                  <a:srgbClr val="F5F7FA"/>
+                </a:solidFill>
+                <a:latin typeface="Segoe UI"/>
+              </a:defRPr>
+            </a:pPr>
+            <a:r>
+              <a:t>Authorization tokens lock API endpoints to validated mechanic sessions.</a:t>
+            </a:r>
+          </a:p>
+          <a:p>
+            <a:pPr>
+              <a:spcAft>
+                <a:spcPts val="1200"/>
+              </a:spcAft>
+              <a:defRPr sz="1400">
+                <a:solidFill>
+                  <a:srgbClr val="F5F7FA"/>
+                </a:solidFill>
+                <a:latin typeface="Segoe UI"/>
+              </a:defRPr>
+            </a:pPr>
+            <a:r>
+              <a:t>All transactions are logged in Postgres to maintain compliance audits.</a:t>
             </a:r>
           </a:p>
         </p:txBody>
